--- a/Final_Яковенко_StudyMate.pptx
+++ b/Final_Яковенко_StudyMate.pptx
@@ -5998,22 +5998,6 @@
                 </a:solidFill>
                 <a:latin typeface="Calibri"/>
               </a:rPr>
-              <a:t>🔧 formula_lookup</a:t>
-            </a:r>
-          </a:p>
-          <a:p>
-            <a:pPr algn="l">
-              <a:spcAft>
-                <a:spcPts val="400"/>
-              </a:spcAft>
-            </a:pPr>
-            <a:r>
-              <a:rPr sz="1250" b="0">
-                <a:solidFill>
-                  <a:srgbClr val="FFFFFF"/>
-                </a:solidFill>
-                <a:latin typeface="Calibri"/>
-              </a:rPr>
               <a:t>🔧 check_formula_for_task</a:t>
             </a:r>
           </a:p>
@@ -6046,23 +6030,23 @@
                 </a:solidFill>
                 <a:latin typeface="Calibri"/>
               </a:rPr>
-              <a:t>Вердикт: НЕ ПРИДАТНА,</a:t>
-            </a:r>
-          </a:p>
-          <a:p>
-            <a:pPr algn="l">
-              <a:spcAft>
-                <a:spcPts val="400"/>
-              </a:spcAft>
-            </a:pPr>
-            <a:r>
-              <a:rPr sz="1250" b="0">
-                <a:solidFill>
-                  <a:srgbClr val="FFFFFF"/>
-                </a:solidFill>
-                <a:latin typeface="Calibri"/>
-              </a:rPr>
-              <a:t>бо h₀ &gt; 0 проти вимоги h₀ = 0.</a:t>
+              <a:t>У базі дві формули з такою назвою,</a:t>
+            </a:r>
+          </a:p>
+          <a:p>
+            <a:pPr algn="l">
+              <a:spcAft>
+                <a:spcPts val="400"/>
+              </a:spcAft>
+            </a:pPr>
+            <a:r>
+              <a:rPr sz="1250" b="0">
+                <a:solidFill>
+                  <a:srgbClr val="FFFFFF"/>
+                </a:solidFill>
+                <a:latin typeface="Calibri"/>
+              </a:rPr>
+              <a:t>тому система перевіряє ОБИДВІ:</a:t>
             </a:r>
           </a:p>
           <a:p>
@@ -6094,39 +6078,71 @@
                 </a:solidFill>
                 <a:latin typeface="Calibri"/>
               </a:rPr>
-              <a:t>Система одразу дає правильну</a:t>
-            </a:r>
-          </a:p>
-          <a:p>
-            <a:pPr algn="l">
-              <a:spcAft>
-                <a:spcPts val="400"/>
-              </a:spcAft>
-            </a:pPr>
-            <a:r>
-              <a:rPr sz="1250" b="0">
-                <a:solidFill>
-                  <a:srgbClr val="FFFFFF"/>
-                </a:solidFill>
-                <a:latin typeface="Calibri"/>
-              </a:rPr>
-              <a:t>альтернативу: розрахунок</a:t>
-            </a:r>
-          </a:p>
-          <a:p>
-            <a:pPr algn="l">
-              <a:spcAft>
-                <a:spcPts val="400"/>
-              </a:spcAft>
-            </a:pPr>
-            <a:r>
-              <a:rPr sz="1250" b="0">
-                <a:solidFill>
-                  <a:srgbClr val="FFFFFF"/>
-                </a:solidFill>
-                <a:latin typeface="Calibri"/>
-              </a:rPr>
-              <a:t>через час польоту.</a:t>
+              <a:t>❌ для рівної поверхні: h₀ &gt; 0</a:t>
+            </a:r>
+          </a:p>
+          <a:p>
+            <a:pPr algn="l">
+              <a:spcAft>
+                <a:spcPts val="400"/>
+              </a:spcAft>
+            </a:pPr>
+            <a:r>
+              <a:rPr sz="1250" b="0">
+                <a:solidFill>
+                  <a:srgbClr val="FFFFFF"/>
+                </a:solidFill>
+                <a:latin typeface="Calibri"/>
+              </a:rPr>
+              <a:t>проти вимоги h₀ = 0</a:t>
+            </a:r>
+          </a:p>
+          <a:p>
+            <a:pPr algn="l">
+              <a:spcAft>
+                <a:spcPts val="400"/>
+              </a:spcAft>
+            </a:pPr>
+            <a:r>
+              <a:rPr sz="1250" b="0">
+                <a:solidFill>
+                  <a:srgbClr val="FFFFFF"/>
+                </a:solidFill>
+                <a:latin typeface="Calibri"/>
+              </a:rPr>
+              <a:t>✅ для кидання з висоти</a:t>
+            </a:r>
+          </a:p>
+          <a:p>
+            <a:pPr algn="l">
+              <a:spcAft>
+                <a:spcPts val="400"/>
+              </a:spcAft>
+            </a:pPr>
+            <a:r>
+              <a:rPr sz="1250" b="0">
+                <a:solidFill>
+                  <a:srgbClr val="FFFFFF"/>
+                </a:solidFill>
+                <a:latin typeface="Calibri"/>
+              </a:rPr>
+              <a:t/>
+            </a:r>
+          </a:p>
+          <a:p>
+            <a:pPr algn="l">
+              <a:spcAft>
+                <a:spcPts val="400"/>
+              </a:spcAft>
+            </a:pPr>
+            <a:r>
+              <a:rPr sz="1250" b="0">
+                <a:solidFill>
+                  <a:srgbClr val="FFFFFF"/>
+                </a:solidFill>
+                <a:latin typeface="Calibri"/>
+              </a:rPr>
+              <a:t>«Бери другу» + сама формула.</a:t>
             </a:r>
           </a:p>
         </p:txBody>
